--- a/ut3/UT3_resumen.pptx
+++ b/ut3/UT3_resumen.pptx
@@ -169,13 +169,13 @@
   <p:extLst>
     <p:ext uri="{521415D9-36F7-43E2-AB2F-B90AF26B5E84}">
       <p14:sectionLst xmlns:p14="http://schemas.microsoft.com/office/powerpoint/2010/main">
-        <p14:section name="Inicio" id="{dd5e848d-61cd-1089-4df4-487e141aaed6}">
+        <p14:section name="Inicio" id="{07bd99e7-acf1-14ed-28ba-a2e93670d5f0}">
           <p14:sldIdLst>
             <p14:sldId id="256"/>
             <p14:sldId id="257"/>
           </p14:sldIdLst>
         </p14:section>
-        <p14:section name="01 · El modelo relacional" id="{7234af74-f953-a5e2-c51f-752824852227}">
+        <p14:section name="01 · El modelo relacional" id="{fcd46d7a-9be6-a1ef-7f35-9b5a1c6c5abe}">
           <p14:sldIdLst>
             <p14:sldId id="258"/>
             <p14:sldId id="259"/>
@@ -191,7 +191,7 @@
             <p14:sldId id="269"/>
           </p14:sldIdLst>
         </p14:section>
-        <p14:section name="02 · Claves" id="{a8ea91ab-c2a4-7f54-795b-1359891766fd}">
+        <p14:section name="02 · Claves" id="{f8f05acc-3563-bc2c-0baf-7ad0a546ebd8}">
           <p14:sldIdLst>
             <p14:sldId id="270"/>
             <p14:sldId id="271"/>
@@ -204,7 +204,7 @@
             <p14:sldId id="278"/>
           </p14:sldIdLst>
         </p14:section>
-        <p14:section name="03 · Restricciones e integridad referencial" id="{e3386eb1-b350-5d2a-b142-d964adead9a1}">
+        <p14:section name="03 · Restricciones e integridad referencial" id="{f9c7d7c9-80c2-2fdc-4c7f-0e19c58c9213}">
           <p14:sldIdLst>
             <p14:sldId id="279"/>
             <p14:sldId id="280"/>
@@ -216,7 +216,7 @@
             <p14:sldId id="286"/>
           </p14:sldIdLst>
         </p14:section>
-        <p14:section name="04 · Paso a tablas: reglas básicas" id="{e2171781-9f7e-68b7-0ac5-558d2729c1fc}">
+        <p14:section name="04 · Paso a tablas: reglas básicas" id="{7f5bc291-640a-dd61-7939-a806288b8c49}">
           <p14:sldIdLst>
             <p14:sldId id="287"/>
             <p14:sldId id="288"/>
@@ -233,7 +233,7 @@
             <p14:sldId id="299"/>
           </p14:sldIdLst>
         </p14:section>
-        <p14:section name="05 · Reflexivas, ternarias y jerarquías" id="{25643413-634e-11de-a23a-6e34dc91e6e4}">
+        <p14:section name="05 · Reflexivas, ternarias y jerarquías" id="{7c443777-9c65-9317-1b31-4b88dcb97eea}">
           <p14:sldIdLst>
             <p14:sldId id="300"/>
             <p14:sldId id="301"/>
@@ -244,7 +244,7 @@
             <p14:sldId id="306"/>
           </p14:sldIdLst>
         </p14:section>
-        <p14:section name="06 · Dependencias funcionales" id="{a31cb76e-967d-0924-31da-ab13cb200ed9}">
+        <p14:section name="06 · Dependencias funcionales" id="{c80acf4b-4423-72c9-9d4e-3b673b03bca1}">
           <p14:sldIdLst>
             <p14:sldId id="307"/>
             <p14:sldId id="308"/>
@@ -252,7 +252,7 @@
             <p14:sldId id="310"/>
           </p14:sldIdLst>
         </p14:section>
-        <p14:section name="07 · Formas normales: 1FN a FNBC" id="{efab6750-48f3-e400-afcd-fa8b4e9ea502}">
+        <p14:section name="07 · Formas normales: 1FN a FNBC" id="{25e4c257-9c8c-e001-1292-138c98a69fcc}">
           <p14:sldIdLst>
             <p14:sldId id="311"/>
             <p14:sldId id="312"/>
@@ -262,12 +262,12 @@
             <p14:sldId id="316"/>
           </p14:sldIdLst>
         </p14:section>
-        <p14:section name="08 · Ejemplo completo: StarVoice" id="{e9287e57-7a51-2e29-4d4c-d40117a4af7a}">
+        <p14:section name="08 · Ejemplo completo: StarVoice" id="{ab415249-85e0-68a9-7764-ae8a36efcaf4}">
           <p14:sldIdLst>
             <p14:sldId id="317"/>
           </p14:sldIdLst>
         </p14:section>
-        <p14:section name="En resumen" id="{0d556944-a12b-8a00-f3e7-c0b26191c6f2}">
+        <p14:section name="En resumen" id="{28d49434-d542-b223-937f-93c38da632a7}">
           <p14:sldIdLst>
             <p14:sldId id="318"/>
           </p14:sldIdLst>
@@ -2928,7 +2928,7 @@
               <a:rPr lang="en-US" dirty="0"/>
               <a:t>04 — Mapping to tables
 First, clean up the E/R
-EN: 04 — Mapping to tables First, clean up the E/R COMPOSITE They're split nombre_completo becomes nombre , apellido1 and apellido2 . MULTI-VALUED They become an entity If email takes several values: an EMAIL entity related 1:N to EMPLOYEE. DERIVED They aren't stored age is calculated when querying; storing it invites inconsistencies. Then one question solves almost everything: look at the maximum and the minimum of each entity in the relationship.</a:t>
+EN: 04 — Mapping to tables First, clean up the E/R COMPOSITE They're split nombre_completo becomes nombre , apellido1 and apellido2 . MULTI-VALUED They become an entity If email takes several values: an EMAIL entity related 1:N to EMPLOYEE. DERIVED They aren't stored age is calculated when querying; storing it invites inconsistencies. Then one question solves almost everything: look at what is drawn next to each entity (the N and the (0,1)).</a:t>
             </a:r>
             <a:endParaRPr lang="en-US" dirty="0"/>
           </a:p>
@@ -3378,7 +3378,7 @@
               <a:rPr lang="en-US" dirty="0"/>
               <a:t>04 — Mapping to tables
 Rule 4: 1:N, the key travels to the “many” side
-EN: 04 — Mapping to tables Rule 4: 1:N, the key travels to the “many” side DEPARTMENT ( dept_code , name) EMPLOYEE ( dni , name, dept_code ) underlined = primary key · italic = foreign key · dashed = unique Each employee stores their department. Since the minimum is 1, cod_dep is NOT NULL ; with (0,1) it would allow nulls. A table of its own only for many nulls, a likely future N:M, or relationship attributes.</a:t>
+EN: 04 — Mapping to tables Rule 4: 1:N, the key travels to the “many” side DEPARTMENT ( dept_code , name) EMPLOYEE ( dni , name, dept_code ) underlined = primary key · italic = foreign key · dashed = unique The N is drawn next to EMPLEADO: that's where the key travels. Since (1,1) is drawn next to DEPARTAMENTO, cod_dep is NOT NULL ; with (0,1) it would allow nulls. A table of its own only for many nulls, a likely future N:M, or relationship attributes.</a:t>
             </a:r>
             <a:endParaRPr lang="en-US" dirty="0"/>
           </a:p>
@@ -3557,8 +3557,8 @@
             <a:r>
               <a:rPr lang="en-US" dirty="0"/>
               <a:t>04 — Mapping to tables
-Rule 5: 1:1, the key goes to whoever always participates
-EN: 04 — Mapping to tables Rule 5: 1:1, the key goes to whoever always participates EMPLOYEE ( tax_id , name) DEPARTMENT ( dept_code , name, director_dni ) underlined = primary key · italic = foreign key · dashed = unique Every department has a director (1,1), but not every employee directs (0,1): the foreign key goes in DEPARTMENT, NOT NULL and UNIQUE (dashed underline). If neither entity always participates, (0,1):(0,1), a table of its own.</a:t>
+Rule 5: 1:1, the key goes where the (0,1) is drawn
+EN: 04 — Mapping to tables Rule 5: 1:1, the key goes where the (0,1) is drawn EMPLOYEE ( tax_id , name) DEPARTMENT ( dept_code , name, director_dni ) underlined = primary key · italic = foreign key · dashed = unique Drawn: (1,1) next to EMPLEADO and (0,1) next to DEPARTAMENTO. The foreign key goes in DEPARTMENT, which has the (0,1) next to it, NOT NULL and UNIQUE (dashed underline). With two (1,1), in either; with two (0,1), a table of its own.</a:t>
             </a:r>
             <a:endParaRPr lang="en-US" dirty="0"/>
           </a:p>
@@ -4818,7 +4818,7 @@
               <a:rPr lang="en-US" dirty="0"/>
               <a:t>05 — Special cases
 Cheat sheet: what becomes what
-EN: 05 — Special cases Cheat sheet: what becomes what Strong entity Table; identifier → primary key. Weak entity Table with the strong entity's key (foreign) + partial identifier. Composite / multi-valued / derived Split / new entity / not stored. N:M New table; key = union of the two foreign keys. 1:N The “one” key as a foreign key in the “many”. 1:1 Foreign key in whoever always participates; own table if neither. Reflexive Like the binary, with the key repeated under another name. Ternary Table with three foreign keys; primary key by the maximum N's. ISA One table, one per entity, or subtypes only.</a:t>
+EN: 05 — Special cases Cheat sheet: what becomes what Strong entity Table; identifier → primary key. Weak entity Table with the strong entity's key (foreign) + partial identifier. Composite / multi-valued / derived Split / new entity / not stored. N:M New table; key = union of the two foreign keys. 1:N The “one” key becomes a foreign key in the table of the entity that has the N drawn next to it. 1:1 Depends on the minimums: the key goes in the entity that always participates, the one with the (0,1) drawn next to it. Two (1,1): either. Two (0,1): own table. Reflexive Like the binary, with the key repeated under another name. Ternary Table with three foreign keys; primary key by the maximum N's. ISA A single table (C), one per entity (A) or subtypes only (B).</a:t>
             </a:r>
             <a:endParaRPr lang="en-US" dirty="0"/>
           </a:p>
@@ -5988,7 +5988,7 @@
               <a:rPr lang="en-US" dirty="0"/>
               <a:t>In summary
 Five ideas to take away
-EN: In summary Five ideas to take away The relational model organises data into tables of rows (tuples) and columns (attributes), each with its domain. Keys identify rows (candidate, primary, alternate) and link tables (foreign, which can be null). Mapping to tables N:M → new table; 1:N → the key travels to the “many”; 1:1 → to whoever always participates. Normalising means splitting distinct facts into distinct tables: 1NF atomic, 2NF no partials, 3NF no transitives, BCNF every determinant is a key. A schema doesn't say it all minimums like (2,N) or “total” in an ISA are enforced with triggers or from the application. Summary built from Unit 3 · Logical design — Databases, 1st year DAM — Marina Preciados Agapito.</a:t>
+EN: In summary Five ideas to take away The relational model organises data into tables of rows (tuples) and columns (attributes), each with its domain. Keys identify rows (candidate, primary, alternate) and link tables (foreign, which can be null). Mapping to tables N:M → new table; 1:N → the key goes to the table with the N next to it; 1:1 → to the table with the (0,1) next to it. Normalising means splitting distinct facts into distinct tables: 1NF atomic, 2NF no partials, 3NF no transitives, BCNF every determinant is a key. A schema doesn't say it all minimums like (2,N) or “total” in an ISA are enforced with triggers or from the application. Summary built from Unit 3 · Logical design — Databases, 1st year DAM — Marina Preciados Agapito.</a:t>
             </a:r>
             <a:endParaRPr lang="en-US" dirty="0"/>
           </a:p>
@@ -24678,7 +24678,7 @@
                   <a:srgbClr val="4B4F58"/>
                 </a:solidFill>
               </a:rPr>
-              <a:t>Después, una pregunta lo resuelve casi todo: mira el </a:t>
+              <a:t>Después, una pregunta lo resuelve casi todo: mira lo que está </a:t>
             </a:r>
             <a:pPr algn="l" indent="0" marL="0">
               <a:buNone/>
@@ -24689,7 +24689,7 @@
                   <a:srgbClr val="4B4F58"/>
                 </a:solidFill>
               </a:rPr>
-              <a:t>máximo</a:t>
+              <a:t>pintado</a:t>
             </a:r>
             <a:pPr algn="l" indent="0" marL="0">
               <a:buNone/>
@@ -24700,29 +24700,7 @@
                   <a:srgbClr val="4B4F58"/>
                 </a:solidFill>
               </a:rPr>
-              <a:t> y el </a:t>
-            </a:r>
-            <a:pPr algn="l" indent="0" marL="0">
-              <a:buNone/>
-            </a:pPr>
-            <a:r>
-              <a:rPr lang="en-US" sz="2700" b="1" dirty="0">
-                <a:solidFill>
-                  <a:srgbClr val="4B4F58"/>
-                </a:solidFill>
-              </a:rPr>
-              <a:t>mínimo</a:t>
-            </a:r>
-            <a:pPr algn="l" indent="0" marL="0">
-              <a:buNone/>
-            </a:pPr>
-            <a:r>
-              <a:rPr lang="en-US" sz="2700" dirty="0">
-                <a:solidFill>
-                  <a:srgbClr val="4B4F58"/>
-                </a:solidFill>
-              </a:rPr>
-              <a:t> de cada entidad en la relación.</a:t>
+              <a:t> junto a cada entidad (la N y el (0,1)).</a:t>
             </a:r>
             <a:endParaRPr lang="en-US" sz="2700" dirty="0"/>
           </a:p>
@@ -26915,7 +26893,7 @@
         </p:blipFill>
         <p:spPr>
           <a:xfrm>
-            <a:off x="685800" y="2016319"/>
+            <a:off x="685800" y="1783080"/>
             <a:ext cx="5626450" cy="1662028"/>
           </a:xfrm>
           <a:prstGeom prst="rect">
@@ -26939,7 +26917,7 @@
         </p:blipFill>
         <p:spPr>
           <a:xfrm>
-            <a:off x="6745053" y="2016319"/>
+            <a:off x="6745053" y="1783080"/>
             <a:ext cx="4760842" cy="1326771"/>
           </a:xfrm>
           <a:prstGeom prst="rect">
@@ -26955,8 +26933,8 @@
         </p:nvSpPr>
         <p:spPr>
           <a:xfrm>
-            <a:off x="685800" y="3861226"/>
-            <a:ext cx="10820095" cy="1843024"/>
+            <a:off x="685800" y="3627988"/>
+            <a:ext cx="10820095" cy="2292350"/>
           </a:xfrm>
           <a:prstGeom prst="rect">
             <a:avLst/>
@@ -26977,7 +26955,7 @@
                   <a:srgbClr val="4B4F58"/>
                 </a:solidFill>
               </a:rPr>
-              <a:t>Cada empleado guarda su departamento. Como el mínimo es 1, </a:t>
+              <a:t>La N está pintada junto a EMPLEADO: ahí viaja la clave. Como junto a DEPARTAMENTO está pintado (1,1), </a:t>
             </a:r>
             <a:pPr algn="l" indent="0" marL="0">
               <a:buNone/>
@@ -28373,7 +28351,7 @@
                   <a:schemeClr val="tx1"/>
                 </a:solidFill>
               </a:rPr>
-              <a:t>Regla 5: 1:1, la clave va a quien siempre participa</a:t>
+              <a:t>Regla 5: 1:1, la clave va donde está pintado el (0,1)</a:t>
             </a:r>
             <a:endParaRPr lang="en-US" sz="4000" dirty="0"/>
           </a:p>
@@ -28457,7 +28435,7 @@
                   <a:srgbClr val="4B4F58"/>
                 </a:solidFill>
               </a:rPr>
-              <a:t>Todo departamento tiene director (1,1), pero no todo empleado dirige (0,1): la foránea va en DEPARTAMENTO, con </a:t>
+              <a:t>Pintado: (1,1) junto a EMPLEADO y (0,1) junto a DEPARTAMENTO. La foránea va en DEPARTAMENTO, que tiene el (0,1) al lado, con </a:t>
             </a:r>
             <a:pPr algn="l" indent="0" marL="0">
               <a:buNone/>
@@ -28507,7 +28485,7 @@
                   <a:srgbClr val="4B4F58"/>
                 </a:solidFill>
               </a:rPr>
-              <a:t> (subrayado discontinuo). Si ninguna entidad participa siempre, (0,1):(0,1), tabla propia.</a:t>
+              <a:t> (subrayado discontinuo). Con dos (1,1), en cualquiera; con dos (0,1), tabla propia.</a:t>
             </a:r>
             <a:endParaRPr lang="en-US" sz="2700" dirty="0"/>
           </a:p>
@@ -36823,14 +36801,14 @@
       </p:sp>
       <p:sp>
         <p:nvSpPr>
-          <p:cNvPr id="4" name="kv-k-2600"/>
+          <p:cNvPr id="4" name="kv-k-2654"/>
           <p:cNvSpPr txBox="1"/>
           <p:nvPr/>
         </p:nvSpPr>
         <p:spPr>
           <a:xfrm>
             <a:off x="685800" y="1856232"/>
-            <a:ext cx="1645920" cy="881634"/>
+            <a:ext cx="1645920" cy="539217"/>
           </a:xfrm>
           <a:prstGeom prst="rect">
             <a:avLst/>
@@ -36846,27 +36824,27 @@
               <a:buNone/>
             </a:pPr>
             <a:r>
-              <a:rPr lang="en-US" sz="1300" b="1" dirty="0">
+              <a:rPr lang="en-US" sz="1100" b="1" dirty="0">
                 <a:solidFill>
                   <a:srgbClr val="0D1A7A"/>
                 </a:solidFill>
               </a:rPr>
               <a:t>Entidad fuerte</a:t>
             </a:r>
-            <a:endParaRPr lang="en-US" sz="1300" dirty="0"/>
-          </a:p>
-        </p:txBody>
-      </p:sp>
-      <p:sp>
-        <p:nvSpPr>
-          <p:cNvPr id="5" name="kv-v-2601"/>
+            <a:endParaRPr lang="en-US" sz="1100" dirty="0"/>
+          </a:p>
+        </p:txBody>
+      </p:sp>
+      <p:sp>
+        <p:nvSpPr>
+          <p:cNvPr id="5" name="kv-v-2655"/>
           <p:cNvSpPr txBox="1"/>
           <p:nvPr/>
         </p:nvSpPr>
         <p:spPr>
           <a:xfrm>
             <a:off x="2423160" y="1837944"/>
-            <a:ext cx="3489808" cy="881634"/>
+            <a:ext cx="3489808" cy="539217"/>
           </a:xfrm>
           <a:prstGeom prst="rect">
             <a:avLst/>
@@ -36882,26 +36860,26 @@
               <a:buNone/>
             </a:pPr>
             <a:r>
-              <a:rPr lang="en-US" sz="1700" dirty="0">
+              <a:rPr lang="en-US" sz="1450" dirty="0">
                 <a:solidFill>
                   <a:srgbClr val="4B4F58"/>
                 </a:solidFill>
               </a:rPr>
               <a:t>Tabla; identificador → clave primaria.</a:t>
             </a:r>
-            <a:endParaRPr lang="en-US" sz="1700" dirty="0"/>
-          </a:p>
-        </p:txBody>
-      </p:sp>
-      <p:sp>
-        <p:nvSpPr>
-          <p:cNvPr id="6" name="kv-line-2602"/>
+            <a:endParaRPr lang="en-US" sz="1450" dirty="0"/>
+          </a:p>
+        </p:txBody>
+      </p:sp>
+      <p:sp>
+        <p:nvSpPr>
+          <p:cNvPr id="6" name="kv-line-2656"/>
           <p:cNvSpPr/>
           <p:nvPr/>
         </p:nvSpPr>
         <p:spPr>
           <a:xfrm>
-            <a:off x="685800" y="2756154"/>
+            <a:off x="685800" y="2413737"/>
             <a:ext cx="5227168" cy="0"/>
           </a:xfrm>
           <a:prstGeom prst="line">
@@ -36918,14 +36896,14 @@
       </p:sp>
       <p:sp>
         <p:nvSpPr>
-          <p:cNvPr id="7" name="kv-k-2603"/>
+          <p:cNvPr id="7" name="kv-k-2657"/>
           <p:cNvSpPr txBox="1"/>
           <p:nvPr/>
         </p:nvSpPr>
         <p:spPr>
           <a:xfrm>
             <a:off x="6278728" y="1856232"/>
-            <a:ext cx="1645920" cy="881634"/>
+            <a:ext cx="1645920" cy="539217"/>
           </a:xfrm>
           <a:prstGeom prst="rect">
             <a:avLst/>
@@ -36941,27 +36919,27 @@
               <a:buNone/>
             </a:pPr>
             <a:r>
-              <a:rPr lang="en-US" sz="1300" b="1" dirty="0">
+              <a:rPr lang="en-US" sz="1100" b="1" dirty="0">
                 <a:solidFill>
                   <a:srgbClr val="0D1A7A"/>
                 </a:solidFill>
               </a:rPr>
               <a:t>Entidad débil</a:t>
             </a:r>
-            <a:endParaRPr lang="en-US" sz="1300" dirty="0"/>
-          </a:p>
-        </p:txBody>
-      </p:sp>
-      <p:sp>
-        <p:nvSpPr>
-          <p:cNvPr id="8" name="kv-v-2604"/>
+            <a:endParaRPr lang="en-US" sz="1100" dirty="0"/>
+          </a:p>
+        </p:txBody>
+      </p:sp>
+      <p:sp>
+        <p:nvSpPr>
+          <p:cNvPr id="8" name="kv-v-2658"/>
           <p:cNvSpPr txBox="1"/>
           <p:nvPr/>
         </p:nvSpPr>
         <p:spPr>
           <a:xfrm>
             <a:off x="8016088" y="1837944"/>
-            <a:ext cx="3489808" cy="881634"/>
+            <a:ext cx="3489808" cy="539217"/>
           </a:xfrm>
           <a:prstGeom prst="rect">
             <a:avLst/>
@@ -36977,26 +36955,26 @@
               <a:buNone/>
             </a:pPr>
             <a:r>
-              <a:rPr lang="en-US" sz="1700" dirty="0">
+              <a:rPr lang="en-US" sz="1450" dirty="0">
                 <a:solidFill>
                   <a:srgbClr val="4B4F58"/>
                 </a:solidFill>
               </a:rPr>
               <a:t>Tabla con la clave de la fuerte (foránea) + identificador parcial.</a:t>
             </a:r>
-            <a:endParaRPr lang="en-US" sz="1700" dirty="0"/>
-          </a:p>
-        </p:txBody>
-      </p:sp>
-      <p:sp>
-        <p:nvSpPr>
-          <p:cNvPr id="9" name="kv-line-2605"/>
+            <a:endParaRPr lang="en-US" sz="1450" dirty="0"/>
+          </a:p>
+        </p:txBody>
+      </p:sp>
+      <p:sp>
+        <p:nvSpPr>
+          <p:cNvPr id="9" name="kv-line-2659"/>
           <p:cNvSpPr/>
           <p:nvPr/>
         </p:nvSpPr>
         <p:spPr>
           <a:xfrm>
-            <a:off x="6278728" y="2756154"/>
+            <a:off x="6278728" y="2413737"/>
             <a:ext cx="5227168" cy="0"/>
           </a:xfrm>
           <a:prstGeom prst="line">
@@ -37013,14 +36991,14 @@
       </p:sp>
       <p:sp>
         <p:nvSpPr>
-          <p:cNvPr id="10" name="kv-k-2606"/>
+          <p:cNvPr id="10" name="kv-k-2660"/>
           <p:cNvSpPr txBox="1"/>
           <p:nvPr/>
         </p:nvSpPr>
         <p:spPr>
           <a:xfrm>
-            <a:off x="685800" y="2865882"/>
-            <a:ext cx="1645920" cy="618236"/>
+            <a:off x="685800" y="2523465"/>
+            <a:ext cx="1645920" cy="539217"/>
           </a:xfrm>
           <a:prstGeom prst="rect">
             <a:avLst/>
@@ -37036,27 +37014,27 @@
               <a:buNone/>
             </a:pPr>
             <a:r>
-              <a:rPr lang="en-US" sz="1300" b="1" dirty="0">
+              <a:rPr lang="en-US" sz="1100" b="1" dirty="0">
                 <a:solidFill>
                   <a:srgbClr val="0D1A7A"/>
                 </a:solidFill>
               </a:rPr>
               <a:t>Compuesto / multivaluado / derivado</a:t>
             </a:r>
-            <a:endParaRPr lang="en-US" sz="1300" dirty="0"/>
-          </a:p>
-        </p:txBody>
-      </p:sp>
-      <p:sp>
-        <p:nvSpPr>
-          <p:cNvPr id="11" name="kv-v-2607"/>
+            <a:endParaRPr lang="en-US" sz="1100" dirty="0"/>
+          </a:p>
+        </p:txBody>
+      </p:sp>
+      <p:sp>
+        <p:nvSpPr>
+          <p:cNvPr id="11" name="kv-v-2661"/>
           <p:cNvSpPr txBox="1"/>
           <p:nvPr/>
         </p:nvSpPr>
         <p:spPr>
           <a:xfrm>
-            <a:off x="2423160" y="2847594"/>
-            <a:ext cx="3489808" cy="618236"/>
+            <a:off x="2423160" y="2505177"/>
+            <a:ext cx="3489808" cy="539217"/>
           </a:xfrm>
           <a:prstGeom prst="rect">
             <a:avLst/>
@@ -37072,26 +37050,26 @@
               <a:buNone/>
             </a:pPr>
             <a:r>
-              <a:rPr lang="en-US" sz="1700" dirty="0">
+              <a:rPr lang="en-US" sz="1450" dirty="0">
                 <a:solidFill>
                   <a:srgbClr val="4B4F58"/>
                 </a:solidFill>
               </a:rPr>
               <a:t>Se descompone / nueva entidad / no se almacena.</a:t>
             </a:r>
-            <a:endParaRPr lang="en-US" sz="1700" dirty="0"/>
-          </a:p>
-        </p:txBody>
-      </p:sp>
-      <p:sp>
-        <p:nvSpPr>
-          <p:cNvPr id="12" name="kv-line-2608"/>
+            <a:endParaRPr lang="en-US" sz="1450" dirty="0"/>
+          </a:p>
+        </p:txBody>
+      </p:sp>
+      <p:sp>
+        <p:nvSpPr>
+          <p:cNvPr id="12" name="kv-line-2662"/>
           <p:cNvSpPr/>
           <p:nvPr/>
         </p:nvSpPr>
         <p:spPr>
           <a:xfrm>
-            <a:off x="685800" y="3502406"/>
+            <a:off x="685800" y="3080969"/>
             <a:ext cx="5227168" cy="0"/>
           </a:xfrm>
           <a:prstGeom prst="line">
@@ -37108,14 +37086,14 @@
       </p:sp>
       <p:sp>
         <p:nvSpPr>
-          <p:cNvPr id="13" name="kv-k-2609"/>
+          <p:cNvPr id="13" name="kv-k-2663"/>
           <p:cNvSpPr txBox="1"/>
           <p:nvPr/>
         </p:nvSpPr>
         <p:spPr>
           <a:xfrm>
-            <a:off x="6278728" y="2865882"/>
-            <a:ext cx="1645920" cy="618236"/>
+            <a:off x="6278728" y="2523465"/>
+            <a:ext cx="1645920" cy="539217"/>
           </a:xfrm>
           <a:prstGeom prst="rect">
             <a:avLst/>
@@ -37131,27 +37109,27 @@
               <a:buNone/>
             </a:pPr>
             <a:r>
-              <a:rPr lang="en-US" sz="1300" b="1" dirty="0">
+              <a:rPr lang="en-US" sz="1100" b="1" dirty="0">
                 <a:solidFill>
                   <a:srgbClr val="0D1A7A"/>
                 </a:solidFill>
               </a:rPr>
               <a:t>N:M</a:t>
             </a:r>
-            <a:endParaRPr lang="en-US" sz="1300" dirty="0"/>
-          </a:p>
-        </p:txBody>
-      </p:sp>
-      <p:sp>
-        <p:nvSpPr>
-          <p:cNvPr id="14" name="kv-v-2610"/>
+            <a:endParaRPr lang="en-US" sz="1100" dirty="0"/>
+          </a:p>
+        </p:txBody>
+      </p:sp>
+      <p:sp>
+        <p:nvSpPr>
+          <p:cNvPr id="14" name="kv-v-2664"/>
           <p:cNvSpPr txBox="1"/>
           <p:nvPr/>
         </p:nvSpPr>
         <p:spPr>
           <a:xfrm>
-            <a:off x="8016088" y="2847594"/>
-            <a:ext cx="3489808" cy="618236"/>
+            <a:off x="8016088" y="2505177"/>
+            <a:ext cx="3489808" cy="539217"/>
           </a:xfrm>
           <a:prstGeom prst="rect">
             <a:avLst/>
@@ -37167,26 +37145,26 @@
               <a:buNone/>
             </a:pPr>
             <a:r>
-              <a:rPr lang="en-US" sz="1700" dirty="0">
+              <a:rPr lang="en-US" sz="1450" dirty="0">
                 <a:solidFill>
                   <a:srgbClr val="4B4F58"/>
                 </a:solidFill>
               </a:rPr>
               <a:t>Tabla nueva; clave = unión de las dos foráneas.</a:t>
             </a:r>
-            <a:endParaRPr lang="en-US" sz="1700" dirty="0"/>
-          </a:p>
-        </p:txBody>
-      </p:sp>
-      <p:sp>
-        <p:nvSpPr>
-          <p:cNvPr id="15" name="kv-line-2611"/>
+            <a:endParaRPr lang="en-US" sz="1450" dirty="0"/>
+          </a:p>
+        </p:txBody>
+      </p:sp>
+      <p:sp>
+        <p:nvSpPr>
+          <p:cNvPr id="15" name="kv-line-2665"/>
           <p:cNvSpPr/>
           <p:nvPr/>
         </p:nvSpPr>
         <p:spPr>
           <a:xfrm>
-            <a:off x="6278728" y="3502406"/>
+            <a:off x="6278728" y="3080969"/>
             <a:ext cx="5227168" cy="0"/>
           </a:xfrm>
           <a:prstGeom prst="line">
@@ -37203,14 +37181,14 @@
       </p:sp>
       <p:sp>
         <p:nvSpPr>
-          <p:cNvPr id="16" name="kv-k-2612"/>
+          <p:cNvPr id="16" name="kv-k-2666"/>
           <p:cNvSpPr txBox="1"/>
           <p:nvPr/>
         </p:nvSpPr>
         <p:spPr>
           <a:xfrm>
-            <a:off x="685800" y="3612134"/>
-            <a:ext cx="1645920" cy="881634"/>
+            <a:off x="685800" y="3190697"/>
+            <a:ext cx="1645920" cy="1210881"/>
           </a:xfrm>
           <a:prstGeom prst="rect">
             <a:avLst/>
@@ -37226,27 +37204,27 @@
               <a:buNone/>
             </a:pPr>
             <a:r>
-              <a:rPr lang="en-US" sz="1300" b="1" dirty="0">
+              <a:rPr lang="en-US" sz="1100" b="1" dirty="0">
                 <a:solidFill>
                   <a:srgbClr val="0D1A7A"/>
                 </a:solidFill>
               </a:rPr>
               <a:t>1:N</a:t>
             </a:r>
-            <a:endParaRPr lang="en-US" sz="1300" dirty="0"/>
-          </a:p>
-        </p:txBody>
-      </p:sp>
-      <p:sp>
-        <p:nvSpPr>
-          <p:cNvPr id="17" name="kv-v-2613"/>
+            <a:endParaRPr lang="en-US" sz="1100" dirty="0"/>
+          </a:p>
+        </p:txBody>
+      </p:sp>
+      <p:sp>
+        <p:nvSpPr>
+          <p:cNvPr id="17" name="kv-v-2667"/>
           <p:cNvSpPr txBox="1"/>
           <p:nvPr/>
         </p:nvSpPr>
         <p:spPr>
           <a:xfrm>
-            <a:off x="2423160" y="3593846"/>
-            <a:ext cx="3489808" cy="881634"/>
+            <a:off x="2423160" y="3172409"/>
+            <a:ext cx="3489808" cy="1210881"/>
           </a:xfrm>
           <a:prstGeom prst="rect">
             <a:avLst/>
@@ -37262,26 +37240,26 @@
               <a:buNone/>
             </a:pPr>
             <a:r>
-              <a:rPr lang="en-US" sz="1700" dirty="0">
+              <a:rPr lang="en-US" sz="1450" dirty="0">
                 <a:solidFill>
                   <a:srgbClr val="4B4F58"/>
                 </a:solidFill>
               </a:rPr>
-              <a:t>Clave del «uno» como foránea en el «muchos».</a:t>
-            </a:r>
-            <a:endParaRPr lang="en-US" sz="1700" dirty="0"/>
-          </a:p>
-        </p:txBody>
-      </p:sp>
-      <p:sp>
-        <p:nvSpPr>
-          <p:cNvPr id="18" name="kv-line-2614"/>
+              <a:t>La clave del «uno» pasa como foránea a la tabla de la entidad que tiene la N pintada al lado.</a:t>
+            </a:r>
+            <a:endParaRPr lang="en-US" sz="1450" dirty="0"/>
+          </a:p>
+        </p:txBody>
+      </p:sp>
+      <p:sp>
+        <p:nvSpPr>
+          <p:cNvPr id="18" name="kv-line-2668"/>
           <p:cNvSpPr/>
           <p:nvPr/>
         </p:nvSpPr>
         <p:spPr>
           <a:xfrm>
-            <a:off x="685800" y="4512056"/>
+            <a:off x="685800" y="4419867"/>
             <a:ext cx="5227168" cy="0"/>
           </a:xfrm>
           <a:prstGeom prst="line">
@@ -37298,14 +37276,14 @@
       </p:sp>
       <p:sp>
         <p:nvSpPr>
-          <p:cNvPr id="19" name="kv-k-2615"/>
+          <p:cNvPr id="19" name="kv-k-2669"/>
           <p:cNvSpPr txBox="1"/>
           <p:nvPr/>
         </p:nvSpPr>
         <p:spPr>
           <a:xfrm>
-            <a:off x="6278728" y="3612134"/>
-            <a:ext cx="1645920" cy="881634"/>
+            <a:off x="6278728" y="3190697"/>
+            <a:ext cx="1645920" cy="1210881"/>
           </a:xfrm>
           <a:prstGeom prst="rect">
             <a:avLst/>
@@ -37321,27 +37299,27 @@
               <a:buNone/>
             </a:pPr>
             <a:r>
-              <a:rPr lang="en-US" sz="1300" b="1" dirty="0">
+              <a:rPr lang="en-US" sz="1100" b="1" dirty="0">
                 <a:solidFill>
                   <a:srgbClr val="0D1A7A"/>
                 </a:solidFill>
               </a:rPr>
               <a:t>1:1</a:t>
             </a:r>
-            <a:endParaRPr lang="en-US" sz="1300" dirty="0"/>
-          </a:p>
-        </p:txBody>
-      </p:sp>
-      <p:sp>
-        <p:nvSpPr>
-          <p:cNvPr id="20" name="kv-v-2616"/>
+            <a:endParaRPr lang="en-US" sz="1100" dirty="0"/>
+          </a:p>
+        </p:txBody>
+      </p:sp>
+      <p:sp>
+        <p:nvSpPr>
+          <p:cNvPr id="20" name="kv-v-2670"/>
           <p:cNvSpPr txBox="1"/>
           <p:nvPr/>
         </p:nvSpPr>
         <p:spPr>
           <a:xfrm>
-            <a:off x="8016088" y="3593846"/>
-            <a:ext cx="3489808" cy="881634"/>
+            <a:off x="8016088" y="3172409"/>
+            <a:ext cx="3489808" cy="1210881"/>
           </a:xfrm>
           <a:prstGeom prst="rect">
             <a:avLst/>
@@ -37357,26 +37335,26 @@
               <a:buNone/>
             </a:pPr>
             <a:r>
-              <a:rPr lang="en-US" sz="1700" dirty="0">
+              <a:rPr lang="en-US" sz="1450" dirty="0">
                 <a:solidFill>
                   <a:srgbClr val="4B4F58"/>
                 </a:solidFill>
               </a:rPr>
-              <a:t>Foránea en quien participa siempre; tabla propia si ninguna.</a:t>
-            </a:r>
-            <a:endParaRPr lang="en-US" sz="1700" dirty="0"/>
-          </a:p>
-        </p:txBody>
-      </p:sp>
-      <p:sp>
-        <p:nvSpPr>
-          <p:cNvPr id="21" name="kv-line-2617"/>
+              <a:t>Depende de los mínimos: la clave va en la que siempre participa, la que tiene el (0,1) pintado al lado. Dos (1,1): cualquiera. Dos (0,1): tabla propia.</a:t>
+            </a:r>
+            <a:endParaRPr lang="en-US" sz="1450" dirty="0"/>
+          </a:p>
+        </p:txBody>
+      </p:sp>
+      <p:sp>
+        <p:nvSpPr>
+          <p:cNvPr id="21" name="kv-line-2671"/>
           <p:cNvSpPr/>
           <p:nvPr/>
         </p:nvSpPr>
         <p:spPr>
           <a:xfrm>
-            <a:off x="6278728" y="4512056"/>
+            <a:off x="6278728" y="4419867"/>
             <a:ext cx="5227168" cy="0"/>
           </a:xfrm>
           <a:prstGeom prst="line">
@@ -37393,14 +37371,14 @@
       </p:sp>
       <p:sp>
         <p:nvSpPr>
-          <p:cNvPr id="22" name="kv-k-2618"/>
+          <p:cNvPr id="22" name="kv-k-2672"/>
           <p:cNvSpPr txBox="1"/>
           <p:nvPr/>
         </p:nvSpPr>
         <p:spPr>
           <a:xfrm>
-            <a:off x="685800" y="4621784"/>
-            <a:ext cx="1645920" cy="618236"/>
+            <a:off x="685800" y="4529595"/>
+            <a:ext cx="1645920" cy="539217"/>
           </a:xfrm>
           <a:prstGeom prst="rect">
             <a:avLst/>
@@ -37416,27 +37394,27 @@
               <a:buNone/>
             </a:pPr>
             <a:r>
-              <a:rPr lang="en-US" sz="1300" b="1" dirty="0">
+              <a:rPr lang="en-US" sz="1100" b="1" dirty="0">
                 <a:solidFill>
                   <a:srgbClr val="0D1A7A"/>
                 </a:solidFill>
               </a:rPr>
               <a:t>Reflexiva</a:t>
             </a:r>
-            <a:endParaRPr lang="en-US" sz="1300" dirty="0"/>
-          </a:p>
-        </p:txBody>
-      </p:sp>
-      <p:sp>
-        <p:nvSpPr>
-          <p:cNvPr id="23" name="kv-v-2619"/>
+            <a:endParaRPr lang="en-US" sz="1100" dirty="0"/>
+          </a:p>
+        </p:txBody>
+      </p:sp>
+      <p:sp>
+        <p:nvSpPr>
+          <p:cNvPr id="23" name="kv-v-2673"/>
           <p:cNvSpPr txBox="1"/>
           <p:nvPr/>
         </p:nvSpPr>
         <p:spPr>
           <a:xfrm>
-            <a:off x="2423160" y="4603496"/>
-            <a:ext cx="3489808" cy="618236"/>
+            <a:off x="2423160" y="4511307"/>
+            <a:ext cx="3489808" cy="539217"/>
           </a:xfrm>
           <a:prstGeom prst="rect">
             <a:avLst/>
@@ -37452,26 +37430,26 @@
               <a:buNone/>
             </a:pPr>
             <a:r>
-              <a:rPr lang="en-US" sz="1700" dirty="0">
+              <a:rPr lang="en-US" sz="1450" dirty="0">
                 <a:solidFill>
                   <a:srgbClr val="4B4F58"/>
                 </a:solidFill>
               </a:rPr>
               <a:t>Como la binaria, con la clave repetida con otro nombre.</a:t>
             </a:r>
-            <a:endParaRPr lang="en-US" sz="1700" dirty="0"/>
-          </a:p>
-        </p:txBody>
-      </p:sp>
-      <p:sp>
-        <p:nvSpPr>
-          <p:cNvPr id="24" name="kv-line-2620"/>
+            <a:endParaRPr lang="en-US" sz="1450" dirty="0"/>
+          </a:p>
+        </p:txBody>
+      </p:sp>
+      <p:sp>
+        <p:nvSpPr>
+          <p:cNvPr id="24" name="kv-line-2674"/>
           <p:cNvSpPr/>
           <p:nvPr/>
         </p:nvSpPr>
         <p:spPr>
           <a:xfrm>
-            <a:off x="685800" y="5258308"/>
+            <a:off x="685800" y="5087099"/>
             <a:ext cx="5227168" cy="0"/>
           </a:xfrm>
           <a:prstGeom prst="line">
@@ -37488,14 +37466,14 @@
       </p:sp>
       <p:sp>
         <p:nvSpPr>
-          <p:cNvPr id="25" name="kv-k-2621"/>
+          <p:cNvPr id="25" name="kv-k-2675"/>
           <p:cNvSpPr txBox="1"/>
           <p:nvPr/>
         </p:nvSpPr>
         <p:spPr>
           <a:xfrm>
-            <a:off x="6278728" y="4621784"/>
-            <a:ext cx="1645920" cy="618236"/>
+            <a:off x="6278728" y="4529595"/>
+            <a:ext cx="1645920" cy="539217"/>
           </a:xfrm>
           <a:prstGeom prst="rect">
             <a:avLst/>
@@ -37511,27 +37489,27 @@
               <a:buNone/>
             </a:pPr>
             <a:r>
-              <a:rPr lang="en-US" sz="1300" b="1" dirty="0">
+              <a:rPr lang="en-US" sz="1100" b="1" dirty="0">
                 <a:solidFill>
                   <a:srgbClr val="0D1A7A"/>
                 </a:solidFill>
               </a:rPr>
               <a:t>Ternaria</a:t>
             </a:r>
-            <a:endParaRPr lang="en-US" sz="1300" dirty="0"/>
-          </a:p>
-        </p:txBody>
-      </p:sp>
-      <p:sp>
-        <p:nvSpPr>
-          <p:cNvPr id="26" name="kv-v-2622"/>
+            <a:endParaRPr lang="en-US" sz="1100" dirty="0"/>
+          </a:p>
+        </p:txBody>
+      </p:sp>
+      <p:sp>
+        <p:nvSpPr>
+          <p:cNvPr id="26" name="kv-v-2676"/>
           <p:cNvSpPr txBox="1"/>
           <p:nvPr/>
         </p:nvSpPr>
         <p:spPr>
           <a:xfrm>
-            <a:off x="8016088" y="4603496"/>
-            <a:ext cx="3489808" cy="618236"/>
+            <a:off x="8016088" y="4511307"/>
+            <a:ext cx="3489808" cy="539217"/>
           </a:xfrm>
           <a:prstGeom prst="rect">
             <a:avLst/>
@@ -37547,26 +37525,26 @@
               <a:buNone/>
             </a:pPr>
             <a:r>
-              <a:rPr lang="en-US" sz="1700" dirty="0">
+              <a:rPr lang="en-US" sz="1450" dirty="0">
                 <a:solidFill>
                   <a:srgbClr val="4B4F58"/>
                 </a:solidFill>
               </a:rPr>
               <a:t>Tabla con tres foráneas; primaria según los máximos N.</a:t>
             </a:r>
-            <a:endParaRPr lang="en-US" sz="1700" dirty="0"/>
-          </a:p>
-        </p:txBody>
-      </p:sp>
-      <p:sp>
-        <p:nvSpPr>
-          <p:cNvPr id="27" name="kv-line-2623"/>
+            <a:endParaRPr lang="en-US" sz="1450" dirty="0"/>
+          </a:p>
+        </p:txBody>
+      </p:sp>
+      <p:sp>
+        <p:nvSpPr>
+          <p:cNvPr id="27" name="kv-line-2677"/>
           <p:cNvSpPr/>
           <p:nvPr/>
         </p:nvSpPr>
         <p:spPr>
           <a:xfrm>
-            <a:off x="6278728" y="5258308"/>
+            <a:off x="6278728" y="5087099"/>
             <a:ext cx="5227168" cy="0"/>
           </a:xfrm>
           <a:prstGeom prst="line">
@@ -37583,14 +37561,14 @@
       </p:sp>
       <p:sp>
         <p:nvSpPr>
-          <p:cNvPr id="28" name="kv-k-2624"/>
+          <p:cNvPr id="28" name="kv-k-2678"/>
           <p:cNvSpPr txBox="1"/>
           <p:nvPr/>
         </p:nvSpPr>
         <p:spPr>
           <a:xfrm>
-            <a:off x="685800" y="5368036"/>
-            <a:ext cx="1645920" cy="618236"/>
+            <a:off x="685800" y="5196827"/>
+            <a:ext cx="1645920" cy="539217"/>
           </a:xfrm>
           <a:prstGeom prst="rect">
             <a:avLst/>
@@ -37606,27 +37584,27 @@
               <a:buNone/>
             </a:pPr>
             <a:r>
-              <a:rPr lang="en-US" sz="1300" b="1" dirty="0">
+              <a:rPr lang="en-US" sz="1100" b="1" dirty="0">
                 <a:solidFill>
                   <a:srgbClr val="0D1A7A"/>
                 </a:solidFill>
               </a:rPr>
               <a:t>ISA</a:t>
             </a:r>
-            <a:endParaRPr lang="en-US" sz="1300" dirty="0"/>
-          </a:p>
-        </p:txBody>
-      </p:sp>
-      <p:sp>
-        <p:nvSpPr>
-          <p:cNvPr id="29" name="kv-v-2625"/>
+            <a:endParaRPr lang="en-US" sz="1100" dirty="0"/>
+          </a:p>
+        </p:txBody>
+      </p:sp>
+      <p:sp>
+        <p:nvSpPr>
+          <p:cNvPr id="29" name="kv-v-2679"/>
           <p:cNvSpPr txBox="1"/>
           <p:nvPr/>
         </p:nvSpPr>
         <p:spPr>
           <a:xfrm>
-            <a:off x="2423160" y="5349748"/>
-            <a:ext cx="3489808" cy="618236"/>
+            <a:off x="2423160" y="5178539"/>
+            <a:ext cx="3489808" cy="539217"/>
           </a:xfrm>
           <a:prstGeom prst="rect">
             <a:avLst/>
@@ -37642,26 +37620,26 @@
               <a:buNone/>
             </a:pPr>
             <a:r>
-              <a:rPr lang="en-US" sz="1700" dirty="0">
+              <a:rPr lang="en-US" sz="1450" dirty="0">
                 <a:solidFill>
                   <a:srgbClr val="4B4F58"/>
                 </a:solidFill>
               </a:rPr>
-              <a:t>Una tabla, una por entidad, o solo subtipos.</a:t>
-            </a:r>
-            <a:endParaRPr lang="en-US" sz="1700" dirty="0"/>
-          </a:p>
-        </p:txBody>
-      </p:sp>
-      <p:sp>
-        <p:nvSpPr>
-          <p:cNvPr id="30" name="kv-line-2626"/>
+              <a:t>Una sola tabla (C), una por entidad (A) o solo subtipos (B).</a:t>
+            </a:r>
+            <a:endParaRPr lang="en-US" sz="1450" dirty="0"/>
+          </a:p>
+        </p:txBody>
+      </p:sp>
+      <p:sp>
+        <p:nvSpPr>
+          <p:cNvPr id="30" name="kv-line-2680"/>
           <p:cNvSpPr/>
           <p:nvPr/>
         </p:nvSpPr>
         <p:spPr>
           <a:xfrm>
-            <a:off x="685800" y="6004560"/>
+            <a:off x="685800" y="5754332"/>
             <a:ext cx="5227168" cy="0"/>
           </a:xfrm>
           <a:prstGeom prst="line">
@@ -37827,7 +37805,7 @@
       </p:sp>
       <p:pic>
         <p:nvPicPr>
-          <p:cNvPr id="4" name="imagen-2781" descr="Diagrama / tabla de la diapositiva">    </p:cNvPr>
+          <p:cNvPr id="4" name="imagen-2835" descr="Diagrama / tabla de la diapositiva">    </p:cNvPr>
           <p:cNvPicPr>
             <a:picLocks noChangeAspect="1"/>
           </p:cNvPicPr>
@@ -37851,7 +37829,7 @@
       </p:pic>
       <p:sp>
         <p:nvSpPr>
-          <p:cNvPr id="5" name="card-2782"/>
+          <p:cNvPr id="5" name="card-2836"/>
           <p:cNvSpPr/>
           <p:nvPr/>
         </p:nvSpPr>
@@ -37878,7 +37856,7 @@
       </p:sp>
       <p:sp>
         <p:nvSpPr>
-          <p:cNvPr id="6" name="tag-pill-2783"/>
+          <p:cNvPr id="6" name="tag-pill-2837"/>
           <p:cNvSpPr/>
           <p:nvPr/>
         </p:nvSpPr>
@@ -37900,7 +37878,7 @@
       </p:sp>
       <p:sp>
         <p:nvSpPr>
-          <p:cNvPr id="7" name="tag-2784"/>
+          <p:cNvPr id="7" name="tag-2838"/>
           <p:cNvSpPr txBox="1"/>
           <p:nvPr/>
         </p:nvSpPr>
@@ -37936,7 +37914,7 @@
       </p:sp>
       <p:sp>
         <p:nvSpPr>
-          <p:cNvPr id="8" name="card-p-2785"/>
+          <p:cNvPr id="8" name="card-p-2839"/>
           <p:cNvSpPr txBox="1"/>
           <p:nvPr/>
         </p:nvSpPr>
@@ -37972,7 +37950,7 @@
       </p:sp>
       <p:sp>
         <p:nvSpPr>
-          <p:cNvPr id="9" name="card-2786"/>
+          <p:cNvPr id="9" name="card-2840"/>
           <p:cNvSpPr/>
           <p:nvPr/>
         </p:nvSpPr>
@@ -37999,7 +37977,7 @@
       </p:sp>
       <p:sp>
         <p:nvSpPr>
-          <p:cNvPr id="10" name="tag-pill-2787"/>
+          <p:cNvPr id="10" name="tag-pill-2841"/>
           <p:cNvSpPr/>
           <p:nvPr/>
         </p:nvSpPr>
@@ -38021,7 +37999,7 @@
       </p:sp>
       <p:sp>
         <p:nvSpPr>
-          <p:cNvPr id="11" name="tag-2788"/>
+          <p:cNvPr id="11" name="tag-2842"/>
           <p:cNvSpPr txBox="1"/>
           <p:nvPr/>
         </p:nvSpPr>
@@ -38057,7 +38035,7 @@
       </p:sp>
       <p:sp>
         <p:nvSpPr>
-          <p:cNvPr id="12" name="card-p-2789"/>
+          <p:cNvPr id="12" name="card-p-2843"/>
           <p:cNvSpPr txBox="1"/>
           <p:nvPr/>
         </p:nvSpPr>
@@ -38118,7 +38096,7 @@
       </p:sp>
       <p:sp>
         <p:nvSpPr>
-          <p:cNvPr id="13" name="card-2790"/>
+          <p:cNvPr id="13" name="card-2844"/>
           <p:cNvSpPr/>
           <p:nvPr/>
         </p:nvSpPr>
@@ -38145,7 +38123,7 @@
       </p:sp>
       <p:sp>
         <p:nvSpPr>
-          <p:cNvPr id="14" name="tag-pill-2791"/>
+          <p:cNvPr id="14" name="tag-pill-2845"/>
           <p:cNvSpPr/>
           <p:nvPr/>
         </p:nvSpPr>
@@ -38167,7 +38145,7 @@
       </p:sp>
       <p:sp>
         <p:nvSpPr>
-          <p:cNvPr id="15" name="tag-2792"/>
+          <p:cNvPr id="15" name="tag-2846"/>
           <p:cNvSpPr txBox="1"/>
           <p:nvPr/>
         </p:nvSpPr>
@@ -38203,7 +38181,7 @@
       </p:sp>
       <p:sp>
         <p:nvSpPr>
-          <p:cNvPr id="16" name="card-p-2793"/>
+          <p:cNvPr id="16" name="card-p-2847"/>
           <p:cNvSpPr txBox="1"/>
           <p:nvPr/>
         </p:nvSpPr>
@@ -38239,7 +38217,7 @@
       </p:sp>
       <p:sp>
         <p:nvSpPr>
-          <p:cNvPr id="17" name="note-2794"/>
+          <p:cNvPr id="17" name="note-2848"/>
           <p:cNvSpPr txBox="1"/>
           <p:nvPr/>
         </p:nvSpPr>
@@ -38424,7 +38402,7 @@
       </p:sp>
       <p:sp>
         <p:nvSpPr>
-          <p:cNvPr id="4" name="card-2859"/>
+          <p:cNvPr id="4" name="card-2913"/>
           <p:cNvSpPr/>
           <p:nvPr/>
         </p:nvSpPr>
@@ -38451,7 +38429,7 @@
       </p:sp>
       <p:sp>
         <p:nvSpPr>
-          <p:cNvPr id="5" name="tag-pill-2860"/>
+          <p:cNvPr id="5" name="tag-pill-2914"/>
           <p:cNvSpPr/>
           <p:nvPr/>
         </p:nvSpPr>
@@ -38473,7 +38451,7 @@
       </p:sp>
       <p:sp>
         <p:nvSpPr>
-          <p:cNvPr id="6" name="tag-2861"/>
+          <p:cNvPr id="6" name="tag-2915"/>
           <p:cNvSpPr txBox="1"/>
           <p:nvPr/>
         </p:nvSpPr>
@@ -38509,7 +38487,7 @@
       </p:sp>
       <p:sp>
         <p:nvSpPr>
-          <p:cNvPr id="7" name="card-h-2862"/>
+          <p:cNvPr id="7" name="card-h-2916"/>
           <p:cNvSpPr txBox="1"/>
           <p:nvPr/>
         </p:nvSpPr>
@@ -38545,7 +38523,7 @@
       </p:sp>
       <p:sp>
         <p:nvSpPr>
-          <p:cNvPr id="8" name="card-p-2863"/>
+          <p:cNvPr id="8" name="card-p-2917"/>
           <p:cNvSpPr txBox="1"/>
           <p:nvPr/>
         </p:nvSpPr>
@@ -38656,7 +38634,7 @@
       </p:sp>
       <p:sp>
         <p:nvSpPr>
-          <p:cNvPr id="9" name="card-2864"/>
+          <p:cNvPr id="9" name="card-2918"/>
           <p:cNvSpPr/>
           <p:nvPr/>
         </p:nvSpPr>
@@ -38683,7 +38661,7 @@
       </p:sp>
       <p:sp>
         <p:nvSpPr>
-          <p:cNvPr id="10" name="tag-pill-2865"/>
+          <p:cNvPr id="10" name="tag-pill-2919"/>
           <p:cNvSpPr/>
           <p:nvPr/>
         </p:nvSpPr>
@@ -38705,7 +38683,7 @@
       </p:sp>
       <p:sp>
         <p:nvSpPr>
-          <p:cNvPr id="11" name="tag-2866"/>
+          <p:cNvPr id="11" name="tag-2920"/>
           <p:cNvSpPr txBox="1"/>
           <p:nvPr/>
         </p:nvSpPr>
@@ -38741,7 +38719,7 @@
       </p:sp>
       <p:sp>
         <p:nvSpPr>
-          <p:cNvPr id="12" name="card-h-2867"/>
+          <p:cNvPr id="12" name="card-h-2921"/>
           <p:cNvSpPr txBox="1"/>
           <p:nvPr/>
         </p:nvSpPr>
@@ -38777,7 +38755,7 @@
       </p:sp>
       <p:sp>
         <p:nvSpPr>
-          <p:cNvPr id="13" name="card-p-2868"/>
+          <p:cNvPr id="13" name="card-p-2922"/>
           <p:cNvSpPr txBox="1"/>
           <p:nvPr/>
         </p:nvSpPr>
@@ -38888,7 +38866,7 @@
       </p:sp>
       <p:sp>
         <p:nvSpPr>
-          <p:cNvPr id="14" name="card-2869"/>
+          <p:cNvPr id="14" name="card-2923"/>
           <p:cNvSpPr/>
           <p:nvPr/>
         </p:nvSpPr>
@@ -38915,7 +38893,7 @@
       </p:sp>
       <p:sp>
         <p:nvSpPr>
-          <p:cNvPr id="15" name="tag-pill-2870"/>
+          <p:cNvPr id="15" name="tag-pill-2924"/>
           <p:cNvSpPr/>
           <p:nvPr/>
         </p:nvSpPr>
@@ -38937,7 +38915,7 @@
       </p:sp>
       <p:sp>
         <p:nvSpPr>
-          <p:cNvPr id="16" name="tag-2871"/>
+          <p:cNvPr id="16" name="tag-2925"/>
           <p:cNvSpPr txBox="1"/>
           <p:nvPr/>
         </p:nvSpPr>
@@ -38973,7 +38951,7 @@
       </p:sp>
       <p:sp>
         <p:nvSpPr>
-          <p:cNvPr id="17" name="card-h-2872"/>
+          <p:cNvPr id="17" name="card-h-2926"/>
           <p:cNvSpPr txBox="1"/>
           <p:nvPr/>
         </p:nvSpPr>
@@ -39009,7 +38987,7 @@
       </p:sp>
       <p:sp>
         <p:nvSpPr>
-          <p:cNvPr id="18" name="card-p-2873"/>
+          <p:cNvPr id="18" name="card-p-2927"/>
           <p:cNvSpPr txBox="1"/>
           <p:nvPr/>
         </p:nvSpPr>
@@ -39059,7 +39037,7 @@
       </p:sp>
       <p:sp>
         <p:nvSpPr>
-          <p:cNvPr id="19" name="note-2874"/>
+          <p:cNvPr id="19" name="note-2928"/>
           <p:cNvSpPr txBox="1"/>
           <p:nvPr/>
         </p:nvSpPr>
@@ -39277,7 +39255,7 @@
       </p:sp>
       <p:sp>
         <p:nvSpPr>
-          <p:cNvPr id="4" name="badge-2875"/>
+          <p:cNvPr id="4" name="badge-2929"/>
           <p:cNvSpPr/>
           <p:nvPr/>
         </p:nvSpPr>
@@ -39297,7 +39275,7 @@
       </p:sp>
       <p:sp>
         <p:nvSpPr>
-          <p:cNvPr id="5" name="badge-glyph-2876"/>
+          <p:cNvPr id="5" name="badge-glyph-2930"/>
           <p:cNvSpPr txBox="1"/>
           <p:nvPr/>
         </p:nvSpPr>
@@ -39333,7 +39311,7 @@
       </p:sp>
       <p:sp>
         <p:nvSpPr>
-          <p:cNvPr id="6" name="scenario-card-2901"/>
+          <p:cNvPr id="6" name="scenario-card-2955"/>
           <p:cNvSpPr/>
           <p:nvPr/>
         </p:nvSpPr>
@@ -39360,7 +39338,7 @@
       </p:sp>
       <p:sp>
         <p:nvSpPr>
-          <p:cNvPr id="7" name="scenario-2902"/>
+          <p:cNvPr id="7" name="scenario-2956"/>
           <p:cNvSpPr txBox="1"/>
           <p:nvPr/>
         </p:nvSpPr>
@@ -39435,7 +39413,7 @@
       </p:sp>
       <p:sp>
         <p:nvSpPr>
-          <p:cNvPr id="8" name="marker-2903"/>
+          <p:cNvPr id="8" name="marker-2957"/>
           <p:cNvSpPr txBox="1"/>
           <p:nvPr/>
         </p:nvSpPr>
@@ -39471,7 +39449,7 @@
       </p:sp>
       <p:sp>
         <p:nvSpPr>
-          <p:cNvPr id="9" name="item-2904"/>
+          <p:cNvPr id="9" name="item-2958"/>
           <p:cNvSpPr txBox="1"/>
           <p:nvPr/>
         </p:nvSpPr>
@@ -39507,7 +39485,7 @@
       </p:sp>
       <p:sp>
         <p:nvSpPr>
-          <p:cNvPr id="10" name="marker-2905"/>
+          <p:cNvPr id="10" name="marker-2959"/>
           <p:cNvSpPr txBox="1"/>
           <p:nvPr/>
         </p:nvSpPr>
@@ -39543,7 +39521,7 @@
       </p:sp>
       <p:sp>
         <p:nvSpPr>
-          <p:cNvPr id="11" name="item-2906"/>
+          <p:cNvPr id="11" name="item-2960"/>
           <p:cNvSpPr txBox="1"/>
           <p:nvPr/>
         </p:nvSpPr>
@@ -39579,7 +39557,7 @@
       </p:sp>
       <p:sp>
         <p:nvSpPr>
-          <p:cNvPr id="12" name="marker-2907"/>
+          <p:cNvPr id="12" name="marker-2961"/>
           <p:cNvSpPr txBox="1"/>
           <p:nvPr/>
         </p:nvSpPr>
@@ -39615,7 +39593,7 @@
       </p:sp>
       <p:sp>
         <p:nvSpPr>
-          <p:cNvPr id="13" name="item-2908"/>
+          <p:cNvPr id="13" name="item-2962"/>
           <p:cNvSpPr txBox="1"/>
           <p:nvPr/>
         </p:nvSpPr>
@@ -39800,7 +39778,7 @@
       </p:sp>
       <p:sp>
         <p:nvSpPr>
-          <p:cNvPr id="4" name="badge-2909"/>
+          <p:cNvPr id="4" name="badge-2963"/>
           <p:cNvSpPr/>
           <p:nvPr/>
         </p:nvSpPr>
@@ -39820,7 +39798,7 @@
       </p:sp>
       <p:sp>
         <p:nvSpPr>
-          <p:cNvPr id="5" name="badge-glyph-2910"/>
+          <p:cNvPr id="5" name="badge-glyph-2964"/>
           <p:cNvSpPr txBox="1"/>
           <p:nvPr/>
         </p:nvSpPr>
@@ -39856,7 +39834,7 @@
       </p:sp>
       <p:sp>
         <p:nvSpPr>
-          <p:cNvPr id="6" name="marker-2929"/>
+          <p:cNvPr id="6" name="marker-2983"/>
           <p:cNvSpPr txBox="1"/>
           <p:nvPr/>
         </p:nvSpPr>
@@ -39892,7 +39870,7 @@
       </p:sp>
       <p:sp>
         <p:nvSpPr>
-          <p:cNvPr id="7" name="item-2930"/>
+          <p:cNvPr id="7" name="item-2984"/>
           <p:cNvSpPr txBox="1"/>
           <p:nvPr/>
         </p:nvSpPr>
@@ -39964,7 +39942,7 @@
       </p:sp>
       <p:sp>
         <p:nvSpPr>
-          <p:cNvPr id="8" name="marker-2931"/>
+          <p:cNvPr id="8" name="marker-2985"/>
           <p:cNvSpPr txBox="1"/>
           <p:nvPr/>
         </p:nvSpPr>
@@ -40000,7 +39978,7 @@
       </p:sp>
       <p:sp>
         <p:nvSpPr>
-          <p:cNvPr id="9" name="item-2932"/>
+          <p:cNvPr id="9" name="item-2986"/>
           <p:cNvSpPr txBox="1"/>
           <p:nvPr/>
         </p:nvSpPr>
@@ -40072,7 +40050,7 @@
       </p:sp>
       <p:sp>
         <p:nvSpPr>
-          <p:cNvPr id="10" name="marker-2933"/>
+          <p:cNvPr id="10" name="marker-2987"/>
           <p:cNvSpPr txBox="1"/>
           <p:nvPr/>
         </p:nvSpPr>
@@ -40108,7 +40086,7 @@
       </p:sp>
       <p:sp>
         <p:nvSpPr>
-          <p:cNvPr id="11" name="item-2934"/>
+          <p:cNvPr id="11" name="item-2988"/>
           <p:cNvSpPr txBox="1"/>
           <p:nvPr/>
         </p:nvSpPr>
@@ -40180,7 +40158,7 @@
       </p:sp>
       <p:sp>
         <p:nvSpPr>
-          <p:cNvPr id="12" name="marker-2935"/>
+          <p:cNvPr id="12" name="marker-2989"/>
           <p:cNvSpPr txBox="1"/>
           <p:nvPr/>
         </p:nvSpPr>
@@ -40216,7 +40194,7 @@
       </p:sp>
       <p:sp>
         <p:nvSpPr>
-          <p:cNvPr id="13" name="item-2936"/>
+          <p:cNvPr id="13" name="item-2990"/>
           <p:cNvSpPr txBox="1"/>
           <p:nvPr/>
         </p:nvSpPr>
@@ -40338,7 +40316,7 @@
       </p:sp>
       <p:sp>
         <p:nvSpPr>
-          <p:cNvPr id="14" name="note-2937"/>
+          <p:cNvPr id="14" name="note-2991"/>
           <p:cNvSpPr txBox="1"/>
           <p:nvPr/>
         </p:nvSpPr>
@@ -40523,7 +40501,7 @@
       </p:sp>
       <p:sp>
         <p:nvSpPr>
-          <p:cNvPr id="4" name="card-3006"/>
+          <p:cNvPr id="4" name="card-3060"/>
           <p:cNvSpPr/>
           <p:nvPr/>
         </p:nvSpPr>
@@ -40550,7 +40528,7 @@
       </p:sp>
       <p:sp>
         <p:nvSpPr>
-          <p:cNvPr id="5" name="tag-pill-3007"/>
+          <p:cNvPr id="5" name="tag-pill-3061"/>
           <p:cNvSpPr/>
           <p:nvPr/>
         </p:nvSpPr>
@@ -40572,7 +40550,7 @@
       </p:sp>
       <p:sp>
         <p:nvSpPr>
-          <p:cNvPr id="6" name="tag-3008"/>
+          <p:cNvPr id="6" name="tag-3062"/>
           <p:cNvSpPr txBox="1"/>
           <p:nvPr/>
         </p:nvSpPr>
@@ -40608,7 +40586,7 @@
       </p:sp>
       <p:sp>
         <p:nvSpPr>
-          <p:cNvPr id="7" name="card-p-3009"/>
+          <p:cNvPr id="7" name="card-p-3063"/>
           <p:cNvSpPr txBox="1"/>
           <p:nvPr/>
         </p:nvSpPr>
@@ -40666,7 +40644,7 @@
       </p:sp>
       <p:sp>
         <p:nvSpPr>
-          <p:cNvPr id="8" name="card-3010"/>
+          <p:cNvPr id="8" name="card-3064"/>
           <p:cNvSpPr/>
           <p:nvPr/>
         </p:nvSpPr>
@@ -40693,7 +40671,7 @@
       </p:sp>
       <p:sp>
         <p:nvSpPr>
-          <p:cNvPr id="9" name="tag-pill-3011"/>
+          <p:cNvPr id="9" name="tag-pill-3065"/>
           <p:cNvSpPr/>
           <p:nvPr/>
         </p:nvSpPr>
@@ -40715,7 +40693,7 @@
       </p:sp>
       <p:sp>
         <p:nvSpPr>
-          <p:cNvPr id="10" name="tag-3012"/>
+          <p:cNvPr id="10" name="tag-3066"/>
           <p:cNvSpPr txBox="1"/>
           <p:nvPr/>
         </p:nvSpPr>
@@ -40751,7 +40729,7 @@
       </p:sp>
       <p:sp>
         <p:nvSpPr>
-          <p:cNvPr id="11" name="card-p-3013"/>
+          <p:cNvPr id="11" name="card-p-3067"/>
           <p:cNvSpPr txBox="1"/>
           <p:nvPr/>
         </p:nvSpPr>
@@ -40809,7 +40787,7 @@
       </p:sp>
       <p:sp>
         <p:nvSpPr>
-          <p:cNvPr id="12" name="card-3014"/>
+          <p:cNvPr id="12" name="card-3068"/>
           <p:cNvSpPr/>
           <p:nvPr/>
         </p:nvSpPr>
@@ -40836,7 +40814,7 @@
       </p:sp>
       <p:sp>
         <p:nvSpPr>
-          <p:cNvPr id="13" name="tag-pill-3015"/>
+          <p:cNvPr id="13" name="tag-pill-3069"/>
           <p:cNvSpPr/>
           <p:nvPr/>
         </p:nvSpPr>
@@ -40858,7 +40836,7 @@
       </p:sp>
       <p:sp>
         <p:nvSpPr>
-          <p:cNvPr id="14" name="tag-3016"/>
+          <p:cNvPr id="14" name="tag-3070"/>
           <p:cNvSpPr txBox="1"/>
           <p:nvPr/>
         </p:nvSpPr>
@@ -40894,7 +40872,7 @@
       </p:sp>
       <p:sp>
         <p:nvSpPr>
-          <p:cNvPr id="15" name="card-p-3017"/>
+          <p:cNvPr id="15" name="card-p-3071"/>
           <p:cNvSpPr txBox="1"/>
           <p:nvPr/>
         </p:nvSpPr>
@@ -40952,7 +40930,7 @@
       </p:sp>
       <p:sp>
         <p:nvSpPr>
-          <p:cNvPr id="16" name="card-3018"/>
+          <p:cNvPr id="16" name="card-3072"/>
           <p:cNvSpPr/>
           <p:nvPr/>
         </p:nvSpPr>
@@ -40979,7 +40957,7 @@
       </p:sp>
       <p:sp>
         <p:nvSpPr>
-          <p:cNvPr id="17" name="tag-pill-3019"/>
+          <p:cNvPr id="17" name="tag-pill-3073"/>
           <p:cNvSpPr/>
           <p:nvPr/>
         </p:nvSpPr>
@@ -41001,7 +40979,7 @@
       </p:sp>
       <p:sp>
         <p:nvSpPr>
-          <p:cNvPr id="18" name="tag-3020"/>
+          <p:cNvPr id="18" name="tag-3074"/>
           <p:cNvSpPr txBox="1"/>
           <p:nvPr/>
         </p:nvSpPr>
@@ -41037,7 +41015,7 @@
       </p:sp>
       <p:sp>
         <p:nvSpPr>
-          <p:cNvPr id="19" name="card-p-3021"/>
+          <p:cNvPr id="19" name="card-p-3075"/>
           <p:cNvSpPr txBox="1"/>
           <p:nvPr/>
         </p:nvSpPr>
@@ -41073,7 +41051,7 @@
       </p:sp>
       <p:sp>
         <p:nvSpPr>
-          <p:cNvPr id="20" name="note-3022"/>
+          <p:cNvPr id="20" name="note-3076"/>
           <p:cNvSpPr txBox="1"/>
           <p:nvPr/>
         </p:nvSpPr>
@@ -41280,7 +41258,7 @@
       </p:sp>
       <p:sp>
         <p:nvSpPr>
-          <p:cNvPr id="4" name="chain-step-3039"/>
+          <p:cNvPr id="4" name="chain-step-3093"/>
           <p:cNvSpPr/>
           <p:nvPr/>
         </p:nvSpPr>
@@ -41307,7 +41285,7 @@
       </p:sp>
       <p:sp>
         <p:nvSpPr>
-          <p:cNvPr id="5" name="chain-tag-3040"/>
+          <p:cNvPr id="5" name="chain-tag-3094"/>
           <p:cNvSpPr txBox="1"/>
           <p:nvPr/>
         </p:nvSpPr>
@@ -41343,7 +41321,7 @@
       </p:sp>
       <p:sp>
         <p:nvSpPr>
-          <p:cNvPr id="6" name="chain-p-3041"/>
+          <p:cNvPr id="6" name="chain-p-3095"/>
           <p:cNvSpPr txBox="1"/>
           <p:nvPr/>
         </p:nvSpPr>
@@ -41379,7 +41357,7 @@
       </p:sp>
       <p:sp>
         <p:nvSpPr>
-          <p:cNvPr id="7" name="arrow-3042"/>
+          <p:cNvPr id="7" name="arrow-3096"/>
           <p:cNvSpPr txBox="1"/>
           <p:nvPr/>
         </p:nvSpPr>
@@ -41415,7 +41393,7 @@
       </p:sp>
       <p:sp>
         <p:nvSpPr>
-          <p:cNvPr id="8" name="chain-step-3043"/>
+          <p:cNvPr id="8" name="chain-step-3097"/>
           <p:cNvSpPr/>
           <p:nvPr/>
         </p:nvSpPr>
@@ -41442,7 +41420,7 @@
       </p:sp>
       <p:sp>
         <p:nvSpPr>
-          <p:cNvPr id="9" name="chain-tag-3044"/>
+          <p:cNvPr id="9" name="chain-tag-3098"/>
           <p:cNvSpPr txBox="1"/>
           <p:nvPr/>
         </p:nvSpPr>
@@ -41478,7 +41456,7 @@
       </p:sp>
       <p:sp>
         <p:nvSpPr>
-          <p:cNvPr id="10" name="chain-p-3045"/>
+          <p:cNvPr id="10" name="chain-p-3099"/>
           <p:cNvSpPr txBox="1"/>
           <p:nvPr/>
         </p:nvSpPr>
@@ -41514,7 +41492,7 @@
       </p:sp>
       <p:sp>
         <p:nvSpPr>
-          <p:cNvPr id="11" name="arrow-3046"/>
+          <p:cNvPr id="11" name="arrow-3100"/>
           <p:cNvSpPr txBox="1"/>
           <p:nvPr/>
         </p:nvSpPr>
@@ -41550,7 +41528,7 @@
       </p:sp>
       <p:sp>
         <p:nvSpPr>
-          <p:cNvPr id="12" name="chain-step-3047"/>
+          <p:cNvPr id="12" name="chain-step-3101"/>
           <p:cNvSpPr/>
           <p:nvPr/>
         </p:nvSpPr>
@@ -41577,7 +41555,7 @@
       </p:sp>
       <p:sp>
         <p:nvSpPr>
-          <p:cNvPr id="13" name="chain-tag-3048"/>
+          <p:cNvPr id="13" name="chain-tag-3102"/>
           <p:cNvSpPr txBox="1"/>
           <p:nvPr/>
         </p:nvSpPr>
@@ -41613,7 +41591,7 @@
       </p:sp>
       <p:sp>
         <p:nvSpPr>
-          <p:cNvPr id="14" name="chain-p-3049"/>
+          <p:cNvPr id="14" name="chain-p-3103"/>
           <p:cNvSpPr txBox="1"/>
           <p:nvPr/>
         </p:nvSpPr>
@@ -41649,7 +41627,7 @@
       </p:sp>
       <p:sp>
         <p:nvSpPr>
-          <p:cNvPr id="15" name="arrow-3050"/>
+          <p:cNvPr id="15" name="arrow-3104"/>
           <p:cNvSpPr txBox="1"/>
           <p:nvPr/>
         </p:nvSpPr>
@@ -41685,7 +41663,7 @@
       </p:sp>
       <p:sp>
         <p:nvSpPr>
-          <p:cNvPr id="16" name="chain-step-3051"/>
+          <p:cNvPr id="16" name="chain-step-3105"/>
           <p:cNvSpPr/>
           <p:nvPr/>
         </p:nvSpPr>
@@ -41712,7 +41690,7 @@
       </p:sp>
       <p:sp>
         <p:nvSpPr>
-          <p:cNvPr id="17" name="chain-tag-3052"/>
+          <p:cNvPr id="17" name="chain-tag-3106"/>
           <p:cNvSpPr txBox="1"/>
           <p:nvPr/>
         </p:nvSpPr>
@@ -41748,7 +41726,7 @@
       </p:sp>
       <p:sp>
         <p:nvSpPr>
-          <p:cNvPr id="18" name="chain-p-3053"/>
+          <p:cNvPr id="18" name="chain-p-3107"/>
           <p:cNvSpPr txBox="1"/>
           <p:nvPr/>
         </p:nvSpPr>
@@ -41784,7 +41762,7 @@
       </p:sp>
       <p:sp>
         <p:nvSpPr>
-          <p:cNvPr id="19" name="note-3054"/>
+          <p:cNvPr id="19" name="note-3108"/>
           <p:cNvSpPr txBox="1"/>
           <p:nvPr/>
         </p:nvSpPr>
@@ -41969,7 +41947,7 @@
       </p:sp>
       <p:sp>
         <p:nvSpPr>
-          <p:cNvPr id="4" name="badge-3055"/>
+          <p:cNvPr id="4" name="badge-3109"/>
           <p:cNvSpPr/>
           <p:nvPr/>
         </p:nvSpPr>
@@ -41989,7 +41967,7 @@
       </p:sp>
       <p:sp>
         <p:nvSpPr>
-          <p:cNvPr id="5" name="badge-glyph-3056"/>
+          <p:cNvPr id="5" name="badge-glyph-3110"/>
           <p:cNvSpPr txBox="1"/>
           <p:nvPr/>
         </p:nvSpPr>
@@ -42025,7 +42003,7 @@
       </p:sp>
       <p:sp>
         <p:nvSpPr>
-          <p:cNvPr id="6" name="scenario-card-3060"/>
+          <p:cNvPr id="6" name="scenario-card-3114"/>
           <p:cNvSpPr/>
           <p:nvPr/>
         </p:nvSpPr>
@@ -42052,7 +42030,7 @@
       </p:sp>
       <p:sp>
         <p:nvSpPr>
-          <p:cNvPr id="7" name="scenario-3061"/>
+          <p:cNvPr id="7" name="scenario-3115"/>
           <p:cNvSpPr txBox="1"/>
           <p:nvPr/>
         </p:nvSpPr>
@@ -42127,7 +42105,7 @@
       </p:sp>
       <p:sp>
         <p:nvSpPr>
-          <p:cNvPr id="8" name="lede-3062"/>
+          <p:cNvPr id="8" name="lede-3116"/>
           <p:cNvSpPr txBox="1"/>
           <p:nvPr/>
         </p:nvSpPr>
@@ -42312,7 +42290,7 @@
       </p:sp>
       <p:sp>
         <p:nvSpPr>
-          <p:cNvPr id="4" name="badge-3063"/>
+          <p:cNvPr id="4" name="badge-3117"/>
           <p:cNvSpPr/>
           <p:nvPr/>
         </p:nvSpPr>
@@ -42332,7 +42310,7 @@
       </p:sp>
       <p:sp>
         <p:nvSpPr>
-          <p:cNvPr id="5" name="badge-glyph-3064"/>
+          <p:cNvPr id="5" name="badge-glyph-3118"/>
           <p:cNvSpPr txBox="1"/>
           <p:nvPr/>
         </p:nvSpPr>
@@ -42368,7 +42346,7 @@
       </p:sp>
       <p:sp>
         <p:nvSpPr>
-          <p:cNvPr id="6" name="card-3169"/>
+          <p:cNvPr id="6" name="card-3223"/>
           <p:cNvSpPr/>
           <p:nvPr/>
         </p:nvSpPr>
@@ -42395,7 +42373,7 @@
       </p:sp>
       <p:sp>
         <p:nvSpPr>
-          <p:cNvPr id="7" name="tag-pill-3170"/>
+          <p:cNvPr id="7" name="tag-pill-3224"/>
           <p:cNvSpPr/>
           <p:nvPr/>
         </p:nvSpPr>
@@ -42417,7 +42395,7 @@
       </p:sp>
       <p:sp>
         <p:nvSpPr>
-          <p:cNvPr id="8" name="tag-3171"/>
+          <p:cNvPr id="8" name="tag-3225"/>
           <p:cNvSpPr txBox="1"/>
           <p:nvPr/>
         </p:nvSpPr>
@@ -42453,7 +42431,7 @@
       </p:sp>
       <p:sp>
         <p:nvSpPr>
-          <p:cNvPr id="9" name="card-p-3172"/>
+          <p:cNvPr id="9" name="card-p-3226"/>
           <p:cNvSpPr txBox="1"/>
           <p:nvPr/>
         </p:nvSpPr>
@@ -42514,7 +42492,7 @@
       </p:sp>
       <p:sp>
         <p:nvSpPr>
-          <p:cNvPr id="10" name="card-3173"/>
+          <p:cNvPr id="10" name="card-3227"/>
           <p:cNvSpPr/>
           <p:nvPr/>
         </p:nvSpPr>
@@ -42541,7 +42519,7 @@
       </p:sp>
       <p:sp>
         <p:nvSpPr>
-          <p:cNvPr id="11" name="tag-pill-3174"/>
+          <p:cNvPr id="11" name="tag-pill-3228"/>
           <p:cNvSpPr/>
           <p:nvPr/>
         </p:nvSpPr>
@@ -42563,7 +42541,7 @@
       </p:sp>
       <p:sp>
         <p:nvSpPr>
-          <p:cNvPr id="12" name="tag-3175"/>
+          <p:cNvPr id="12" name="tag-3229"/>
           <p:cNvSpPr txBox="1"/>
           <p:nvPr/>
         </p:nvSpPr>
@@ -42599,7 +42577,7 @@
       </p:sp>
       <p:sp>
         <p:nvSpPr>
-          <p:cNvPr id="13" name="card-p-3176"/>
+          <p:cNvPr id="13" name="card-p-3230"/>
           <p:cNvSpPr txBox="1"/>
           <p:nvPr/>
         </p:nvSpPr>
@@ -42699,7 +42677,7 @@
       </p:sp>
       <p:sp>
         <p:nvSpPr>
-          <p:cNvPr id="14" name="card-3177"/>
+          <p:cNvPr id="14" name="card-3231"/>
           <p:cNvSpPr/>
           <p:nvPr/>
         </p:nvSpPr>
@@ -42726,7 +42704,7 @@
       </p:sp>
       <p:sp>
         <p:nvSpPr>
-          <p:cNvPr id="15" name="tag-pill-3178"/>
+          <p:cNvPr id="15" name="tag-pill-3232"/>
           <p:cNvSpPr/>
           <p:nvPr/>
         </p:nvSpPr>
@@ -42748,7 +42726,7 @@
       </p:sp>
       <p:sp>
         <p:nvSpPr>
-          <p:cNvPr id="16" name="tag-3179"/>
+          <p:cNvPr id="16" name="tag-3233"/>
           <p:cNvSpPr txBox="1"/>
           <p:nvPr/>
         </p:nvSpPr>
@@ -42784,7 +42762,7 @@
       </p:sp>
       <p:sp>
         <p:nvSpPr>
-          <p:cNvPr id="17" name="card-p-3180"/>
+          <p:cNvPr id="17" name="card-p-3234"/>
           <p:cNvSpPr txBox="1"/>
           <p:nvPr/>
         </p:nvSpPr>
@@ -42884,7 +42862,7 @@
       </p:sp>
       <p:pic>
         <p:nvPicPr>
-          <p:cNvPr id="18" name="imagen-3181" descr="Diagrama / tabla de la diapositiva">    </p:cNvPr>
+          <p:cNvPr id="18" name="imagen-3235" descr="Diagrama / tabla de la diapositiva">    </p:cNvPr>
           <p:cNvPicPr>
             <a:picLocks noChangeAspect="1"/>
           </p:cNvPicPr>
@@ -43768,7 +43746,7 @@
       </p:sp>
       <p:sp>
         <p:nvSpPr>
-          <p:cNvPr id="4" name="badge-3182"/>
+          <p:cNvPr id="4" name="badge-3236"/>
           <p:cNvSpPr/>
           <p:nvPr/>
         </p:nvSpPr>
@@ -43788,7 +43766,7 @@
       </p:sp>
       <p:sp>
         <p:nvSpPr>
-          <p:cNvPr id="5" name="badge-glyph-3183"/>
+          <p:cNvPr id="5" name="badge-glyph-3237"/>
           <p:cNvSpPr txBox="1"/>
           <p:nvPr/>
         </p:nvSpPr>
@@ -43824,7 +43802,7 @@
       </p:sp>
       <p:sp>
         <p:nvSpPr>
-          <p:cNvPr id="6" name="scenario-card-3283"/>
+          <p:cNvPr id="6" name="scenario-card-3337"/>
           <p:cNvSpPr/>
           <p:nvPr/>
         </p:nvSpPr>
@@ -43851,7 +43829,7 @@
       </p:sp>
       <p:sp>
         <p:nvSpPr>
-          <p:cNvPr id="7" name="scenario-3284"/>
+          <p:cNvPr id="7" name="scenario-3338"/>
           <p:cNvSpPr txBox="1"/>
           <p:nvPr/>
         </p:nvSpPr>
@@ -43923,7 +43901,7 @@
       </p:sp>
       <p:pic>
         <p:nvPicPr>
-          <p:cNvPr id="8" name="imagen-3285" descr="Diagrama / tabla de la diapositiva">    </p:cNvPr>
+          <p:cNvPr id="8" name="imagen-3339" descr="Diagrama / tabla de la diapositiva">    </p:cNvPr>
           <p:cNvPicPr>
             <a:picLocks noChangeAspect="1"/>
           </p:cNvPicPr>
@@ -43947,7 +43925,7 @@
       </p:pic>
       <p:sp>
         <p:nvSpPr>
-          <p:cNvPr id="9" name="marker-3286"/>
+          <p:cNvPr id="9" name="marker-3340"/>
           <p:cNvSpPr txBox="1"/>
           <p:nvPr/>
         </p:nvSpPr>
@@ -43983,7 +43961,7 @@
       </p:sp>
       <p:sp>
         <p:nvSpPr>
-          <p:cNvPr id="10" name="item-3287"/>
+          <p:cNvPr id="10" name="item-3341"/>
           <p:cNvSpPr txBox="1"/>
           <p:nvPr/>
         </p:nvSpPr>
@@ -44019,7 +43997,7 @@
       </p:sp>
       <p:sp>
         <p:nvSpPr>
-          <p:cNvPr id="11" name="marker-3288"/>
+          <p:cNvPr id="11" name="marker-3342"/>
           <p:cNvSpPr txBox="1"/>
           <p:nvPr/>
         </p:nvSpPr>
@@ -44055,7 +44033,7 @@
       </p:sp>
       <p:sp>
         <p:nvSpPr>
-          <p:cNvPr id="12" name="item-3289"/>
+          <p:cNvPr id="12" name="item-3343"/>
           <p:cNvSpPr txBox="1"/>
           <p:nvPr/>
         </p:nvSpPr>
@@ -44091,7 +44069,7 @@
       </p:sp>
       <p:sp>
         <p:nvSpPr>
-          <p:cNvPr id="13" name="marker-3290"/>
+          <p:cNvPr id="13" name="marker-3344"/>
           <p:cNvSpPr txBox="1"/>
           <p:nvPr/>
         </p:nvSpPr>
@@ -44127,7 +44105,7 @@
       </p:sp>
       <p:sp>
         <p:nvSpPr>
-          <p:cNvPr id="14" name="item-3291"/>
+          <p:cNvPr id="14" name="item-3345"/>
           <p:cNvSpPr txBox="1"/>
           <p:nvPr/>
         </p:nvSpPr>
@@ -44312,7 +44290,7 @@
       </p:sp>
       <p:sp>
         <p:nvSpPr>
-          <p:cNvPr id="4" name="badge-3292"/>
+          <p:cNvPr id="4" name="badge-3346"/>
           <p:cNvSpPr/>
           <p:nvPr/>
         </p:nvSpPr>
@@ -44332,7 +44310,7 @@
       </p:sp>
       <p:sp>
         <p:nvSpPr>
-          <p:cNvPr id="5" name="badge-glyph-3293"/>
+          <p:cNvPr id="5" name="badge-glyph-3347"/>
           <p:cNvSpPr txBox="1"/>
           <p:nvPr/>
         </p:nvSpPr>
@@ -44368,7 +44346,7 @@
       </p:sp>
       <p:sp>
         <p:nvSpPr>
-          <p:cNvPr id="6" name="marker-3318"/>
+          <p:cNvPr id="6" name="marker-3372"/>
           <p:cNvSpPr txBox="1"/>
           <p:nvPr/>
         </p:nvSpPr>
@@ -44404,7 +44382,7 @@
       </p:sp>
       <p:sp>
         <p:nvSpPr>
-          <p:cNvPr id="7" name="item-3319"/>
+          <p:cNvPr id="7" name="item-3373"/>
           <p:cNvSpPr txBox="1"/>
           <p:nvPr/>
         </p:nvSpPr>
@@ -44529,7 +44507,7 @@
       </p:sp>
       <p:sp>
         <p:nvSpPr>
-          <p:cNvPr id="8" name="marker-3320"/>
+          <p:cNvPr id="8" name="marker-3374"/>
           <p:cNvSpPr txBox="1"/>
           <p:nvPr/>
         </p:nvSpPr>
@@ -44565,7 +44543,7 @@
       </p:sp>
       <p:sp>
         <p:nvSpPr>
-          <p:cNvPr id="9" name="item-3321"/>
+          <p:cNvPr id="9" name="item-3375"/>
           <p:cNvSpPr txBox="1"/>
           <p:nvPr/>
         </p:nvSpPr>
@@ -44659,7 +44637,7 @@
       </p:sp>
       <p:pic>
         <p:nvPicPr>
-          <p:cNvPr id="10" name="imagen-3322" descr="Diagrama / tabla de la diapositiva">    </p:cNvPr>
+          <p:cNvPr id="10" name="imagen-3376" descr="Diagrama / tabla de la diapositiva">    </p:cNvPr>
           <p:cNvPicPr>
             <a:picLocks noChangeAspect="1"/>
           </p:cNvPicPr>
@@ -44683,7 +44661,7 @@
       </p:pic>
       <p:sp>
         <p:nvSpPr>
-          <p:cNvPr id="11" name="note-3323"/>
+          <p:cNvPr id="11" name="note-3377"/>
           <p:cNvSpPr txBox="1"/>
           <p:nvPr/>
         </p:nvSpPr>
@@ -44893,7 +44871,7 @@
       </p:sp>
       <p:pic>
         <p:nvPicPr>
-          <p:cNvPr id="4" name="imagen-3344" descr="Diagrama / tabla de la diapositiva">    </p:cNvPr>
+          <p:cNvPr id="4" name="imagen-3398" descr="Diagrama / tabla de la diapositiva">    </p:cNvPr>
           <p:cNvPicPr>
             <a:picLocks noChangeAspect="1"/>
           </p:cNvPicPr>
@@ -44917,7 +44895,7 @@
       </p:pic>
       <p:sp>
         <p:nvSpPr>
-          <p:cNvPr id="5" name="note-3345"/>
+          <p:cNvPr id="5" name="note-3399"/>
           <p:cNvSpPr txBox="1"/>
           <p:nvPr/>
         </p:nvSpPr>
@@ -45177,7 +45155,7 @@
       </p:sp>
       <p:sp>
         <p:nvSpPr>
-          <p:cNvPr id="4" name="fin-dot-3442"/>
+          <p:cNvPr id="4" name="fin-dot-3496"/>
           <p:cNvSpPr/>
           <p:nvPr/>
         </p:nvSpPr>
@@ -45197,7 +45175,7 @@
       </p:sp>
       <p:sp>
         <p:nvSpPr>
-          <p:cNvPr id="5" name="fin-n-3443"/>
+          <p:cNvPr id="5" name="fin-n-3497"/>
           <p:cNvSpPr txBox="1"/>
           <p:nvPr/>
         </p:nvSpPr>
@@ -45233,7 +45211,7 @@
       </p:sp>
       <p:sp>
         <p:nvSpPr>
-          <p:cNvPr id="6" name="fin-txt-3444"/>
+          <p:cNvPr id="6" name="fin-txt-3498"/>
           <p:cNvSpPr txBox="1"/>
           <p:nvPr/>
         </p:nvSpPr>
@@ -45291,7 +45269,7 @@
       </p:sp>
       <p:sp>
         <p:nvSpPr>
-          <p:cNvPr id="7" name="fin-dot-3445"/>
+          <p:cNvPr id="7" name="fin-dot-3499"/>
           <p:cNvSpPr/>
           <p:nvPr/>
         </p:nvSpPr>
@@ -45311,7 +45289,7 @@
       </p:sp>
       <p:sp>
         <p:nvSpPr>
-          <p:cNvPr id="8" name="fin-n-3446"/>
+          <p:cNvPr id="8" name="fin-n-3500"/>
           <p:cNvSpPr txBox="1"/>
           <p:nvPr/>
         </p:nvSpPr>
@@ -45347,7 +45325,7 @@
       </p:sp>
       <p:sp>
         <p:nvSpPr>
-          <p:cNvPr id="9" name="fin-txt-3447"/>
+          <p:cNvPr id="9" name="fin-txt-3501"/>
           <p:cNvSpPr txBox="1"/>
           <p:nvPr/>
         </p:nvSpPr>
@@ -45405,7 +45383,7 @@
       </p:sp>
       <p:sp>
         <p:nvSpPr>
-          <p:cNvPr id="10" name="fin-dot-3448"/>
+          <p:cNvPr id="10" name="fin-dot-3502"/>
           <p:cNvSpPr/>
           <p:nvPr/>
         </p:nvSpPr>
@@ -45425,7 +45403,7 @@
       </p:sp>
       <p:sp>
         <p:nvSpPr>
-          <p:cNvPr id="11" name="fin-n-3449"/>
+          <p:cNvPr id="11" name="fin-n-3503"/>
           <p:cNvSpPr txBox="1"/>
           <p:nvPr/>
         </p:nvSpPr>
@@ -45461,7 +45439,7 @@
       </p:sp>
       <p:sp>
         <p:nvSpPr>
-          <p:cNvPr id="12" name="fin-txt-3450"/>
+          <p:cNvPr id="12" name="fin-txt-3504"/>
           <p:cNvSpPr txBox="1"/>
           <p:nvPr/>
         </p:nvSpPr>
@@ -45511,7 +45489,7 @@
                   <a:srgbClr val="4B4F58"/>
                 </a:solidFill>
               </a:rPr>
-              <a:t>N:M → tabla nueva; 1:N → la clave viaja al «muchos»; 1:1 → a quien siempre participa.</a:t>
+              <a:t>N:M → tabla nueva; 1:N → la clave va a la tabla con la N al lado; 1:1 → a la tabla con el (0,1) al lado.</a:t>
             </a:r>
             <a:endParaRPr lang="en-US" sz="2000" dirty="0"/>
           </a:p>
@@ -45519,7 +45497,7 @@
       </p:sp>
       <p:sp>
         <p:nvSpPr>
-          <p:cNvPr id="13" name="fin-dot-3451"/>
+          <p:cNvPr id="13" name="fin-dot-3505"/>
           <p:cNvSpPr/>
           <p:nvPr/>
         </p:nvSpPr>
@@ -45539,7 +45517,7 @@
       </p:sp>
       <p:sp>
         <p:nvSpPr>
-          <p:cNvPr id="14" name="fin-n-3452"/>
+          <p:cNvPr id="14" name="fin-n-3506"/>
           <p:cNvSpPr txBox="1"/>
           <p:nvPr/>
         </p:nvSpPr>
@@ -45575,7 +45553,7 @@
       </p:sp>
       <p:sp>
         <p:nvSpPr>
-          <p:cNvPr id="15" name="fin-txt-3453"/>
+          <p:cNvPr id="15" name="fin-txt-3507"/>
           <p:cNvSpPr txBox="1"/>
           <p:nvPr/>
         </p:nvSpPr>
@@ -45633,7 +45611,7 @@
       </p:sp>
       <p:sp>
         <p:nvSpPr>
-          <p:cNvPr id="16" name="fin-dot-3454"/>
+          <p:cNvPr id="16" name="fin-dot-3508"/>
           <p:cNvSpPr/>
           <p:nvPr/>
         </p:nvSpPr>
@@ -45653,7 +45631,7 @@
       </p:sp>
       <p:sp>
         <p:nvSpPr>
-          <p:cNvPr id="17" name="fin-n-3455"/>
+          <p:cNvPr id="17" name="fin-n-3509"/>
           <p:cNvSpPr txBox="1"/>
           <p:nvPr/>
         </p:nvSpPr>
@@ -45689,7 +45667,7 @@
       </p:sp>
       <p:sp>
         <p:nvSpPr>
-          <p:cNvPr id="18" name="fin-txt-3456"/>
+          <p:cNvPr id="18" name="fin-txt-3510"/>
           <p:cNvSpPr txBox="1"/>
           <p:nvPr/>
         </p:nvSpPr>
@@ -45747,7 +45725,7 @@
       </p:sp>
       <p:sp>
         <p:nvSpPr>
-          <p:cNvPr id="19" name="credits-3457"/>
+          <p:cNvPr id="19" name="credits-3511"/>
           <p:cNvSpPr txBox="1"/>
           <p:nvPr/>
         </p:nvSpPr>
